--- a/ppt/K-Trainning 1부 분석.pptx
+++ b/ppt/K-Trainning 1부 분석.pptx
@@ -4226,7 +4226,7 @@
         <p:spPr>
           <a:xfrm>
             <a:off x="2949934" y="1876508"/>
-            <a:ext cx="8531749" cy="4455066"/>
+            <a:ext cx="8531749" cy="4616648"/>
           </a:xfrm>
           <a:prstGeom prst="rect">
             <a:avLst/>
@@ -4650,11 +4650,73 @@
               </a:rPr>
               <a:t>애노테이션으로 채워진 멤버변수를 상속받기 위한 추상 클래스</a:t>
             </a:r>
+            <a:endParaRPr lang="en-US" altLang="ko-KR" sz="1050">
+              <a:sym typeface="Wingdings" panose="05000000000000000000" pitchFamily="2" charset="2"/>
+            </a:endParaRPr>
+          </a:p>
+          <a:p>
             <a:r>
               <a:rPr lang="en-US" altLang="ko-KR" sz="1050">
                 <a:sym typeface="Wingdings" panose="05000000000000000000" pitchFamily="2" charset="2"/>
               </a:rPr>
+              <a:t>                                       </a:t>
+            </a:r>
+            <a:r>
+              <a:rPr lang="ko-KR" altLang="en-US" sz="1050">
+                <a:sym typeface="Wingdings" panose="05000000000000000000" pitchFamily="2" charset="2"/>
+              </a:rPr>
+              <a:t>★ 생성일</a:t>
+            </a:r>
+            <a:r>
+              <a:rPr lang="en-US" altLang="ko-KR" sz="1050">
+                <a:sym typeface="Wingdings" panose="05000000000000000000" pitchFamily="2" charset="2"/>
+              </a:rPr>
+              <a:t>, </a:t>
+            </a:r>
+            <a:r>
+              <a:rPr lang="ko-KR" altLang="en-US" sz="1050">
+                <a:sym typeface="Wingdings" panose="05000000000000000000" pitchFamily="2" charset="2"/>
+              </a:rPr>
+              <a:t>수정일 관련 </a:t>
+            </a:r>
+            <a:r>
+              <a:rPr lang="en-US" altLang="ko-KR" sz="1050">
+                <a:sym typeface="Wingdings" panose="05000000000000000000" pitchFamily="2" charset="2"/>
+              </a:rPr>
+              <a:t>Auditing </a:t>
+            </a:r>
+            <a:r>
+              <a:rPr lang="ko-KR" altLang="en-US" sz="1050">
+                <a:sym typeface="Wingdings" panose="05000000000000000000" pitchFamily="2" charset="2"/>
+              </a:rPr>
+              <a:t>기능을 사용하려면 </a:t>
+            </a:r>
+            <a:r>
+              <a:rPr lang="en-US" altLang="ko-KR" sz="1050">
+                <a:solidFill>
+                  <a:srgbClr val="FF0000"/>
+                </a:solidFill>
+                <a:sym typeface="Wingdings" panose="05000000000000000000" pitchFamily="2" charset="2"/>
+              </a:rPr>
+              <a:t>@EntityListener(AuditingEntityListener.class)</a:t>
+            </a:r>
+            <a:r>
+              <a:rPr lang="en-US" altLang="ko-KR" sz="1050">
+                <a:sym typeface="Wingdings" panose="05000000000000000000" pitchFamily="2" charset="2"/>
+              </a:rPr>
               <a:t> </a:t>
+            </a:r>
+            <a:r>
+              <a:rPr lang="ko-KR" altLang="en-US" sz="1050">
+                <a:sym typeface="Wingdings" panose="05000000000000000000" pitchFamily="2" charset="2"/>
+              </a:rPr>
+              <a:t>애노테이션을 붙여야한다</a:t>
+            </a:r>
+            <a:r>
+              <a:rPr lang="en-US" altLang="ko-KR" sz="1050">
+                <a:sym typeface="Wingdings" panose="05000000000000000000" pitchFamily="2" charset="2"/>
+              </a:rPr>
+              <a:t>.</a:t>
             </a:r>
             <a:br>
               <a:rPr lang="en-US" altLang="ko-KR" sz="1050"/>
@@ -4780,6 +4842,12 @@
                 <a:sym typeface="Wingdings" panose="05000000000000000000" pitchFamily="2" charset="2"/>
               </a:rPr>
             </a:br>
+            <a:r>
+              <a:rPr lang="en-US" altLang="ko-KR" sz="1050">
+                <a:sym typeface="Wingdings" panose="05000000000000000000" pitchFamily="2" charset="2"/>
+              </a:rPr>
+              <a:t>                                          </a:t>
+            </a:r>
             <a:br>
               <a:rPr lang="en-US" altLang="ko-KR" sz="1050">
                 <a:sym typeface="Wingdings" panose="05000000000000000000" pitchFamily="2" charset="2"/>
@@ -11719,11 +11787,6 @@
               </a:rPr>
               <a:t>.</a:t>
             </a:r>
-            <a:endParaRPr lang="ko-KR" altLang="en-US" sz="1100">
-              <a:solidFill>
-                <a:schemeClr val="tx1"/>
-              </a:solidFill>
-            </a:endParaRPr>
           </a:p>
         </p:txBody>
       </p:sp>

--- a/ppt/K-Trainning 1부 분석.pptx
+++ b/ppt/K-Trainning 1부 분석.pptx
@@ -18,6 +18,8 @@
     <p:sldId id="266" r:id="rId12"/>
     <p:sldId id="267" r:id="rId13"/>
     <p:sldId id="268" r:id="rId14"/>
+    <p:sldId id="269" r:id="rId15"/>
+    <p:sldId id="270" r:id="rId16"/>
   </p:sldIdLst>
   <p:sldSz cx="12192000" cy="6858000"/>
   <p:notesSz cx="6858000" cy="9144000"/>
@@ -150,6 +152,12 @@
         <p14:section name="global 과 share" id="{12D67798-F028-4000-BBF9-1536EC03D7AF}">
           <p14:sldIdLst>
             <p14:sldId id="268"/>
+          </p14:sldIdLst>
+        </p14:section>
+        <p14:section name="@Constructor 애노테이션 컨벤션" id="{5DED206E-3D31-48A5-903B-3A96785761DA}">
+          <p14:sldIdLst>
+            <p14:sldId id="269"/>
+            <p14:sldId id="270"/>
           </p14:sldIdLst>
         </p14:section>
       </p14:sectionLst>
@@ -6026,6 +6034,195 @@
 </p:sld>
 </file>
 
+<file path=ppt/slides/slide14.xml><?xml version="1.0" encoding="utf-8"?>
+<p:sld xmlns:a="http://schemas.openxmlformats.org/drawingml/2006/main" xmlns:r="http://schemas.openxmlformats.org/officeDocument/2006/relationships" xmlns:p="http://schemas.openxmlformats.org/presentationml/2006/main">
+  <p:cSld>
+    <p:spTree>
+      <p:nvGrpSpPr>
+        <p:cNvPr id="1" name=""/>
+        <p:cNvGrpSpPr/>
+        <p:nvPr/>
+      </p:nvGrpSpPr>
+      <p:grpSpPr>
+        <a:xfrm>
+          <a:off x="0" y="0"/>
+          <a:ext cx="0" cy="0"/>
+          <a:chOff x="0" y="0"/>
+          <a:chExt cx="0" cy="0"/>
+        </a:xfrm>
+      </p:grpSpPr>
+      <p:sp>
+        <p:nvSpPr>
+          <p:cNvPr id="2" name="제목 1">
+            <a:extLst>
+              <a:ext uri="{FF2B5EF4-FFF2-40B4-BE49-F238E27FC236}">
+                <a16:creationId xmlns:a16="http://schemas.microsoft.com/office/drawing/2014/main" id="{636B071D-4743-EAB1-C6BB-48F7918B5679}"/>
+              </a:ext>
+            </a:extLst>
+          </p:cNvPr>
+          <p:cNvSpPr>
+            <a:spLocks noGrp="1"/>
+          </p:cNvSpPr>
+          <p:nvPr>
+            <p:ph type="title"/>
+          </p:nvPr>
+        </p:nvSpPr>
+        <p:spPr/>
+        <p:txBody>
+          <a:bodyPr/>
+          <a:lstStyle/>
+          <a:p>
+            <a:r>
+              <a:rPr lang="en-US" altLang="ko-KR"/>
+              <a:t>Constructor </a:t>
+            </a:r>
+            <a:r>
+              <a:rPr lang="ko-KR" altLang="en-US"/>
+              <a:t>애노테이션의 컨벤션</a:t>
+            </a:r>
+          </a:p>
+        </p:txBody>
+      </p:sp>
+      <p:pic>
+        <p:nvPicPr>
+          <p:cNvPr id="4" name="그림 3">
+            <a:extLst>
+              <a:ext uri="{FF2B5EF4-FFF2-40B4-BE49-F238E27FC236}">
+                <a16:creationId xmlns:a16="http://schemas.microsoft.com/office/drawing/2014/main" id="{AFB1664A-0CBE-3825-0F20-7EB13258DC3F}"/>
+              </a:ext>
+            </a:extLst>
+          </p:cNvPr>
+          <p:cNvPicPr>
+            <a:picLocks noChangeAspect="1"/>
+          </p:cNvPicPr>
+          <p:nvPr/>
+        </p:nvPicPr>
+        <p:blipFill>
+          <a:blip r:embed="rId2"/>
+          <a:stretch>
+            <a:fillRect/>
+          </a:stretch>
+        </p:blipFill>
+        <p:spPr>
+          <a:xfrm>
+            <a:off x="900836" y="1951809"/>
+            <a:ext cx="6239746" cy="2191056"/>
+          </a:xfrm>
+          <a:prstGeom prst="rect">
+            <a:avLst/>
+          </a:prstGeom>
+        </p:spPr>
+      </p:pic>
+    </p:spTree>
+    <p:extLst>
+      <p:ext uri="{BB962C8B-B14F-4D97-AF65-F5344CB8AC3E}">
+        <p14:creationId xmlns:p14="http://schemas.microsoft.com/office/powerpoint/2010/main" val="1366751416"/>
+      </p:ext>
+    </p:extLst>
+  </p:cSld>
+  <p:clrMapOvr>
+    <a:masterClrMapping/>
+  </p:clrMapOvr>
+</p:sld>
+</file>
+
+<file path=ppt/slides/slide15.xml><?xml version="1.0" encoding="utf-8"?>
+<p:sld xmlns:a="http://schemas.openxmlformats.org/drawingml/2006/main" xmlns:r="http://schemas.openxmlformats.org/officeDocument/2006/relationships" xmlns:p="http://schemas.openxmlformats.org/presentationml/2006/main">
+  <p:cSld>
+    <p:spTree>
+      <p:nvGrpSpPr>
+        <p:cNvPr id="1" name=""/>
+        <p:cNvGrpSpPr/>
+        <p:nvPr/>
+      </p:nvGrpSpPr>
+      <p:grpSpPr>
+        <a:xfrm>
+          <a:off x="0" y="0"/>
+          <a:ext cx="0" cy="0"/>
+          <a:chOff x="0" y="0"/>
+          <a:chExt cx="0" cy="0"/>
+        </a:xfrm>
+      </p:grpSpPr>
+      <p:sp>
+        <p:nvSpPr>
+          <p:cNvPr id="2" name="제목 1">
+            <a:extLst>
+              <a:ext uri="{FF2B5EF4-FFF2-40B4-BE49-F238E27FC236}">
+                <a16:creationId xmlns:a16="http://schemas.microsoft.com/office/drawing/2014/main" id="{E079F79A-7645-00F9-DCD5-D3DF0F57542E}"/>
+              </a:ext>
+            </a:extLst>
+          </p:cNvPr>
+          <p:cNvSpPr>
+            <a:spLocks noGrp="1"/>
+          </p:cNvSpPr>
+          <p:nvPr>
+            <p:ph type="title"/>
+          </p:nvPr>
+        </p:nvSpPr>
+        <p:spPr/>
+        <p:txBody>
+          <a:bodyPr/>
+          <a:lstStyle/>
+          <a:p>
+            <a:r>
+              <a:rPr lang="en-US" altLang="ko-KR"/>
+              <a:t>@Service </a:t>
+            </a:r>
+            <a:r>
+              <a:rPr lang="ko-KR" altLang="en-US"/>
+              <a:t>와 </a:t>
+            </a:r>
+            <a:r>
+              <a:rPr lang="en-US" altLang="ko-KR"/>
+              <a:t>@Component</a:t>
+            </a:r>
+            <a:endParaRPr lang="ko-KR" altLang="en-US"/>
+          </a:p>
+        </p:txBody>
+      </p:sp>
+      <p:pic>
+        <p:nvPicPr>
+          <p:cNvPr id="4" name="그림 3">
+            <a:extLst>
+              <a:ext uri="{FF2B5EF4-FFF2-40B4-BE49-F238E27FC236}">
+                <a16:creationId xmlns:a16="http://schemas.microsoft.com/office/drawing/2014/main" id="{41914A7D-BB1A-03E0-3E0C-EB3D0777C8EF}"/>
+              </a:ext>
+            </a:extLst>
+          </p:cNvPr>
+          <p:cNvPicPr>
+            <a:picLocks noChangeAspect="1"/>
+          </p:cNvPicPr>
+          <p:nvPr/>
+        </p:nvPicPr>
+        <p:blipFill>
+          <a:blip r:embed="rId2"/>
+          <a:stretch>
+            <a:fillRect/>
+          </a:stretch>
+        </p:blipFill>
+        <p:spPr>
+          <a:xfrm>
+            <a:off x="1097280" y="1883309"/>
+            <a:ext cx="6611273" cy="4029637"/>
+          </a:xfrm>
+          <a:prstGeom prst="rect">
+            <a:avLst/>
+          </a:prstGeom>
+        </p:spPr>
+      </p:pic>
+    </p:spTree>
+    <p:extLst>
+      <p:ext uri="{BB962C8B-B14F-4D97-AF65-F5344CB8AC3E}">
+        <p14:creationId xmlns:p14="http://schemas.microsoft.com/office/powerpoint/2010/main" val="1687861321"/>
+      </p:ext>
+    </p:extLst>
+  </p:cSld>
+  <p:clrMapOvr>
+    <a:masterClrMapping/>
+  </p:clrMapOvr>
+</p:sld>
+</file>
+
 <file path=ppt/slides/slide2.xml><?xml version="1.0" encoding="utf-8"?>
 <p:sld xmlns:a="http://schemas.openxmlformats.org/drawingml/2006/main" xmlns:r="http://schemas.openxmlformats.org/officeDocument/2006/relationships" xmlns:p="http://schemas.openxmlformats.org/presentationml/2006/main">
   <p:cSld>
